--- a/09/ppt/09-2_AI와_사용자_흐름·개발_계획_확정하기_v1.pptx
+++ b/09/ppt/09-2_AI와_사용자_흐름·개발_계획_확정하기_v1.pptx
@@ -3189,7 +3189,7 @@
                 <a:ea typeface="IBM Plex Sans KR" pitchFamily="34" charset="-122"/>
                 <a:cs typeface="IBM Plex Sans KR" pitchFamily="34" charset="-120"/>
               </a:rPr>
-              <a:t>점수를 매기는 제출물이 아니라 10~13회에 AI와 학생이 함께 읽을 작업 기준이다. 잘 쓰는 것보다 내가 설명할 수 있게 쓰는 것이 중요하다.</a:t>
+              <a:t>점수를 매기는 제출물이 아니라 10~13회에 나와 AI 가 함께 읽을 작업 기준이다. 잘 쓰는 것보다 내가 설명할 수 있게 쓰는 것이 중요하다.</a:t>
             </a:r>
             <a:endParaRPr lang="en-US" sz="1300" dirty="0"/>
           </a:p>
